--- a/data/courses/FBE_2026/slides/FBE_2026_00_Introduction.pptx
+++ b/data/courses/FBE_2026/slides/FBE_2026_00_Introduction.pptx
@@ -4,6 +4,9 @@
   <p:sldMasterIdLst>
     <p:sldMasterId id="2147483648" r:id="rId1"/>
   </p:sldMasterIdLst>
+  <p:notesMasterIdLst>
+    <p:notesMasterId r:id="rId7"/>
+  </p:notesMasterIdLst>
   <p:sldIdLst>
     <p:sldId id="256" r:id="rId2"/>
     <p:sldId id="257" r:id="rId3"/>
@@ -11,9 +14,6 @@
     <p:sldId id="259" r:id="rId5"/>
     <p:sldId id="260" r:id="rId6"/>
   </p:sldIdLst>
-  <p:notesMasterIdLst>
-    <p:notesMasterId r:id="rId7"/>
-  </p:notesMasterIdLst>
   <p:sldSz cx="12192000" cy="6858000"/>
   <p:notesSz cx="6858000" cy="12192000"/>
   <p:defaultTextStyle>
@@ -108,6 +108,11 @@
       </a:defRPr>
     </a:lvl9pPr>
   </p:defaultTextStyle>
+  <p:extLst>
+    <p:ext uri="{EFAFB233-063F-42B5-8137-9DF3F51BA10A}">
+      <p15:sldGuideLst xmlns:p15="http://schemas.microsoft.com/office/powerpoint/2012/main"/>
+    </p:ext>
+  </p:extLst>
 </p:presentation>
 </file>
 
@@ -133,234 +138,10 @@
           <a:chExt cx="0" cy="0"/>
         </a:xfrm>
       </p:grpSpPr>
-      <p:sp>
-        <p:nvSpPr>
-          <p:cNvPr id="2" name="Header Placeholder 1"/>
-          <p:cNvSpPr>
-            <a:spLocks noGrp="1"/>
-          </p:cNvSpPr>
-          <p:nvPr>
-            <p:ph type="hdr" sz="quarter"/>
-          </p:nvPr>
-        </p:nvSpPr>
-        <p:spPr>
-          <a:xfrm>
-            <a:off x="0" y="0"/>
-            <a:ext cx="2971800" cy="458788"/>
-          </a:xfrm>
-          <a:prstGeom prst="rect">
-            <a:avLst/>
-          </a:prstGeom>
-        </p:spPr>
-        <p:txBody>
-          <a:bodyPr vert="horz" lIns="91440" tIns="45720" rIns="91440" bIns="45720" rtlCol="0"/>
-          <a:lstStyle>
-            <a:lvl1pPr algn="l">
-              <a:defRPr sz="1200"/>
-            </a:lvl1pPr>
-          </a:lstStyle>
-          <a:p>
-            <a:endParaRPr lang="en-US"/>
-          </a:p>
-        </p:txBody>
-      </p:sp>
-      <p:sp>
-        <p:nvSpPr>
-          <p:cNvPr id="3" name="Date Placeholder 2"/>
-          <p:cNvSpPr>
-            <a:spLocks noGrp="1"/>
-          </p:cNvSpPr>
-          <p:nvPr>
-            <p:ph type="dt" idx="1"/>
-          </p:nvPr>
-        </p:nvSpPr>
-        <p:spPr>
-          <a:xfrm>
-            <a:off x="3884613" y="0"/>
-            <a:ext cx="2971800" cy="458788"/>
-          </a:xfrm>
-          <a:prstGeom prst="rect">
-            <a:avLst/>
-          </a:prstGeom>
-        </p:spPr>
-        <p:txBody>
-          <a:bodyPr vert="horz" lIns="91440" tIns="45720" rIns="91440" bIns="45720" rtlCol="0"/>
-          <a:lstStyle>
-            <a:lvl1pPr algn="r">
-              <a:defRPr sz="1200"/>
-            </a:lvl1pPr>
-          </a:lstStyle>
-          <a:p>
-            <a:fld id="{5282F153-3F37-0F45-9E97-73ACFA13230C}" type="datetimeFigureOut">
-              <a:rPr lang="en-US"/>
-              <a:t>7/23/19</a:t>
-            </a:fld>
-            <a:endParaRPr lang="en-US"/>
-          </a:p>
-        </p:txBody>
-      </p:sp>
-      <p:sp>
-        <p:nvSpPr>
-          <p:cNvPr id="4" name="Slide Image Placeholder 3"/>
-          <p:cNvSpPr>
-            <a:spLocks noGrp="1" noRot="1" noChangeAspect="1"/>
-          </p:cNvSpPr>
-          <p:nvPr>
-            <p:ph type="sldImg" idx="2"/>
-          </p:nvPr>
-        </p:nvSpPr>
-        <p:spPr>
-          <a:xfrm>
-            <a:off x="685800" y="1143000"/>
-            <a:ext cx="5486400" cy="3086100"/>
-          </a:xfrm>
-          <a:prstGeom prst="rect">
-            <a:avLst/>
-          </a:prstGeom>
-          <a:noFill/>
-          <a:ln w="12700">
-            <a:solidFill>
-              <a:prstClr val="black"/>
-            </a:solidFill>
-          </a:ln>
-        </p:spPr>
-        <p:txBody>
-          <a:bodyPr vert="horz" lIns="91440" tIns="45720" rIns="91440" bIns="45720" rtlCol="0" anchor="ctr"/>
-          <a:lstStyle/>
-          <a:p>
-            <a:endParaRPr lang="en-US"/>
-          </a:p>
-        </p:txBody>
-      </p:sp>
-      <p:sp>
-        <p:nvSpPr>
-          <p:cNvPr id="5" name="Notes Placeholder 4"/>
-          <p:cNvSpPr>
-            <a:spLocks noGrp="1"/>
-          </p:cNvSpPr>
-          <p:nvPr>
-            <p:ph type="body" sz="quarter" idx="3"/>
-          </p:nvPr>
-        </p:nvSpPr>
-        <p:spPr>
-          <a:xfrm>
-            <a:off x="685800" y="4400550"/>
-            <a:ext cx="5486400" cy="3600450"/>
-          </a:xfrm>
-          <a:prstGeom prst="rect">
-            <a:avLst/>
-          </a:prstGeom>
-        </p:spPr>
-        <p:txBody>
-          <a:bodyPr vert="horz" lIns="91440" tIns="45720" rIns="91440" bIns="45720" rtlCol="0"/>
-          <a:lstStyle/>
-          <a:p>
-            <a:pPr lvl="0"/>
-            <a:r>
-              <a:rPr lang="en-US"/>
-              <a:t>Click to edit Master text styles</a:t>
-            </a:r>
-          </a:p>
-          <a:p>
-            <a:pPr lvl="1"/>
-            <a:r>
-              <a:rPr lang="en-US"/>
-              <a:t>Second level</a:t>
-            </a:r>
-          </a:p>
-          <a:p>
-            <a:pPr lvl="2"/>
-            <a:r>
-              <a:rPr lang="en-US"/>
-              <a:t>Third level</a:t>
-            </a:r>
-          </a:p>
-          <a:p>
-            <a:pPr lvl="3"/>
-            <a:r>
-              <a:rPr lang="en-US"/>
-              <a:t>Fourth level</a:t>
-            </a:r>
-          </a:p>
-          <a:p>
-            <a:pPr lvl="4"/>
-            <a:r>
-              <a:rPr lang="en-US"/>
-              <a:t>Fifth level</a:t>
-            </a:r>
-          </a:p>
-        </p:txBody>
-      </p:sp>
-      <p:sp>
-        <p:nvSpPr>
-          <p:cNvPr id="6" name="Footer Placeholder 5"/>
-          <p:cNvSpPr>
-            <a:spLocks noGrp="1"/>
-          </p:cNvSpPr>
-          <p:nvPr>
-            <p:ph type="ftr" sz="quarter" idx="4"/>
-          </p:nvPr>
-        </p:nvSpPr>
-        <p:spPr>
-          <a:xfrm>
-            <a:off x="0" y="8685213"/>
-            <a:ext cx="2971800" cy="458787"/>
-          </a:xfrm>
-          <a:prstGeom prst="rect">
-            <a:avLst/>
-          </a:prstGeom>
-        </p:spPr>
-        <p:txBody>
-          <a:bodyPr vert="horz" lIns="91440" tIns="45720" rIns="91440" bIns="45720" rtlCol="0" anchor="b"/>
-          <a:lstStyle>
-            <a:lvl1pPr algn="l">
-              <a:defRPr sz="1200"/>
-            </a:lvl1pPr>
-          </a:lstStyle>
-          <a:p>
-            <a:endParaRPr lang="en-US"/>
-          </a:p>
-        </p:txBody>
-      </p:sp>
-      <p:sp>
-        <p:nvSpPr>
-          <p:cNvPr id="7" name="Slide Number Placeholder 6"/>
-          <p:cNvSpPr>
-            <a:spLocks noGrp="1"/>
-          </p:cNvSpPr>
-          <p:nvPr>
-            <p:ph type="sldNum" sz="quarter" idx="5"/>
-          </p:nvPr>
-        </p:nvSpPr>
-        <p:spPr>
-          <a:xfrm>
-            <a:off x="3884613" y="8685213"/>
-            <a:ext cx="2971800" cy="458787"/>
-          </a:xfrm>
-          <a:prstGeom prst="rect">
-            <a:avLst/>
-          </a:prstGeom>
-        </p:spPr>
-        <p:txBody>
-          <a:bodyPr vert="horz" lIns="91440" tIns="45720" rIns="91440" bIns="45720" rtlCol="0" anchor="b"/>
-          <a:lstStyle>
-            <a:lvl1pPr algn="r">
-              <a:defRPr sz="1200"/>
-            </a:lvl1pPr>
-          </a:lstStyle>
-          <a:p>
-            <a:fld id="{CE5E9CC1-C706-0F49-92D6-E571CC5EEA8F}" type="slidenum">
-              <a:rPr lang="en-US"/>
-              <a:t>‹#›</a:t>
-            </a:fld>
-            <a:endParaRPr lang="en-US"/>
-          </a:p>
-        </p:txBody>
-      </p:sp>
     </p:spTree>
     <p:extLst>
       <p:ext uri="{BB962C8B-B14F-4D97-AF65-F5344CB8AC3E}">
-        <p14:creationId xmlns:p14="http://schemas.microsoft.com/office/powerpoint/2010/main" val="1024086991"/>
+        <p14:creationId xmlns:p14="http://schemas.microsoft.com/office/powerpoint/2010/main" val="1783198436"/>
       </p:ext>
     </p:extLst>
   </p:cSld>
@@ -504,13 +285,6 @@
           <a:bodyPr/>
           <a:lstStyle/>
           <a:p>
-            <a:r>
-              <a:rPr lang="en-US" dirty="0"/>
-              <a:t>Good afternoon everyone, and welcome. My name is Aurèle Toussaint; I am a CNRS researcher at the CRBE here in Toulouse, and I work on the functional diversity of freshwater fishes — how fish faunas are organised in terms of what species do, how this organisation varies across the planet, and what happens to it when species disappear. Over the next two sessions, I would like to give you a working knowledge of the approach that underlies all of that work: the trait-based approach.
-Today is a lecture: three blocks of about fifty, fifty and thirty minutes, with two breaks. Thursday afternoon is entirely practical: you will work in three groups, in R, on a real question with real data, you will present your results to each other, and you will finish with a short written exam. So everything I say today has one purpose: to make sure that on Thursday, when you type dbFD() or compute a standardised effect size, you know exactly what the number you obtain means, and what it does not mean.
---- INSTRUCTOR NOTE ---
-1 min. Do not read the syllabus; simply say it is on the course page and that the exercise sheets will be handed out at the end of the afternoon.</a:t>
-            </a:r>
             <a:endParaRPr lang="en-US" dirty="0"/>
           </a:p>
         </p:txBody>
@@ -595,13 +369,6 @@
           <a:bodyPr/>
           <a:lstStyle/>
           <a:p>
-            <a:r>
-              <a:rPr lang="en-US" dirty="0"/>
-              <a:t>Let me start with a simple thought experiment. Imagine two rivers. In the first, you catch fifteen species; in the second, you also catch fifteen species. From the point of view of species richness, the two rivers are identical. But now suppose that in the first river the fifteen species are all small, fusiform, mid-water invertivores — fifteen variations on the same theme — while in the second river you have a large piscivore, a bottom-feeding detritivore with a sucker mouth, a surface-feeding insectivore, a deep-bodied fruit-eater, an eel-shaped burrower, and so on. Same richness, completely different rivers: different ways of using energy, different sensitivities to change, different consequences if a species disappears.
-Species richness cannot see this difference. Trait-based ecology was built precisely to see it. That is the whole point of this course: to move from counting who is there to describing what they do, and to do it quantitatively.
---- INSTRUCTOR NOTE ---
-2 min. You can ask the room: "Which of these two rivers would lose more if you removed one species at random?" — take one or two answers, no discussion yet; you will come back to this in Blocks 2 and 3.</a:t>
-            </a:r>
             <a:endParaRPr lang="en-US" dirty="0"/>
           </a:p>
         </p:txBody>
@@ -686,13 +453,6 @@
           <a:bodyPr/>
           <a:lstStyle/>
           <a:p>
-            <a:r>
-              <a:rPr lang="en-US" dirty="0"/>
-              <a:t>There are three practical reasons why this approach has become central in community ecology over the last twenty years.
-First, traits describe communities by function. A body length, a mouth position, a gill-raker density are things an organism does something with; they connect the species list to processes: feeding, swimming, growing, reproducing.
-Second, traits are a common currency. A river in the Amazon and a river in the Loire basin share essentially no species. You cannot compare their species lists; but you can compare their distributions of body sizes, of body shapes, of trophic positions. Traits allow comparisons across regions, across continents, and even across taxonomic groups — you will see plant examples this afternoon because the framework matured in plant ecology, and the concepts transfer directly to fishes.
-Third, traits link composition to the environment on one side and to ecosystem functioning on the other. Which traits allow a species to persist under a given temperature or flow regime? And once a community is assembled, which traits determine how much biomass it produces, how much nutrient it recycles? This double link is the response–effect framework, and we will formalise it in the first block.</a:t>
-            </a:r>
             <a:endParaRPr lang="en-US" dirty="0"/>
           </a:p>
         </p:txBody>
@@ -777,10 +537,6 @@
           <a:bodyPr/>
           <a:lstStyle/>
           <a:p>
-            <a:r>
-              <a:rPr lang="en-US" dirty="0"/>
-              <a:t>Why freshwater fishes, apart from the fact that they are what I work on? Three reasons. Freshwater fishes represent roughly half of all fish species, close to eighteen thousand species, living in less than one per cent of the Earth's surface. They are extraordinarily diverse morphologically: from a two-metre arapaima to a centimetre-long killifish, from a flat catfish glued to the bottom to a piranha with a body like a coin. This diversity of forms has a direct mechanistic meaning: body shape constrains how a fish swims and where it can feed. And finally, freshwater fishes are among the most threatened vertebrates on Earth — dams, pollution, overfishing, invasive species — which makes the question of what we lose functionally when species go extinct a very concrete one. So fishes are both a beautiful system to learn the method and a system where the method matters.</a:t>
-            </a:r>
             <a:endParaRPr lang="en-US" dirty="0"/>
           </a:p>
         </p:txBody>
@@ -865,16 +621,6 @@
           <a:bodyPr/>
           <a:lstStyle/>
           <a:p>
-            <a:r>
-              <a:rPr lang="en-US" dirty="0"/>
-              <a:t>Here is the road map for the afternoon, and it is also the structure of any trait-based analysis you will ever run.
-Step one: we start with a table — species in rows, traits in columns — and we turn it into a functional space, a low-dimensional space in which each species is a point and distances mean functional dissimilarity. This is Block 1, and it is what Group A will do on Thursday.
-Step two: we place communities in this space and summarise them — the community-weighted mean for the dominant strategy, the functional diversity indices for how much of the space is filled and how — and then we ask whether what we observe is different from what we would expect by chance, using null models, and what happens to the space when species are removed. This is Block 2, and it is what Groups B and C will do on Thursday, plus the conservation part that concerns all of you.
-Step three, which is the last block of the afternoon, puts back what the first two steps set aside: the variation among individuals within species. Traits are measured on individuals; the species mean is a choice, and we will see what that choice hides and how to work without it.
-Keep this diagram in mind; I will come back to it at each transition.
---- INSTRUCTOR NOTE ---
-Total for Block 0: ~12 min. Move on to Block 1 at 13:45 at the latest.</a:t>
-            </a:r>
             <a:endParaRPr lang="en-US" dirty="0"/>
           </a:p>
         </p:txBody>
@@ -948,6 +694,11 @@
 <file path=ppt/slideMasters/slideMaster1.xml><?xml version="1.0" encoding="utf-8"?>
 <p:sldMaster xmlns:a="http://schemas.openxmlformats.org/drawingml/2006/main" xmlns:r="http://schemas.openxmlformats.org/officeDocument/2006/relationships" xmlns:p="http://schemas.openxmlformats.org/presentationml/2006/main">
   <p:cSld>
+    <p:bg>
+      <p:bgRef idx="1001">
+        <a:schemeClr val="bg1"/>
+      </p:bgRef>
+    </p:bg>
     <p:spTree>
       <p:nvGrpSpPr>
         <p:cNvPr id="1" name=""/>
@@ -1230,6 +981,7 @@
         <a:solidFill>
           <a:srgbClr val="0B3C5D"/>
         </a:solidFill>
+        <a:effectLst/>
       </p:bgPr>
     </p:bg>
     <p:spTree>
@@ -1267,7 +1019,7 @@
           <a:bodyPr wrap="square" lIns="0" tIns="0" rIns="0" bIns="0" rtlCol="0" anchor="ctr"/>
           <a:lstStyle/>
           <a:p>
-            <a:pPr indent="0" marL="0">
+            <a:pPr marL="0" indent="0">
               <a:buNone/>
             </a:pPr>
             <a:r>
@@ -1306,7 +1058,7 @@
           <a:bodyPr wrap="square" lIns="0" tIns="0" rIns="0" bIns="0" rtlCol="0" anchor="ctr"/>
           <a:lstStyle/>
           <a:p>
-            <a:pPr indent="0" marL="0">
+            <a:pPr marL="0" indent="0">
               <a:buNone/>
             </a:pPr>
             <a:r>
@@ -1345,7 +1097,7 @@
           <a:bodyPr wrap="square" lIns="0" tIns="0" rIns="0" bIns="0" rtlCol="0" anchor="t"/>
           <a:lstStyle/>
           <a:p>
-            <a:pPr indent="0" marL="0">
+            <a:pPr marL="0" indent="0">
               <a:buNone/>
             </a:pPr>
             <a:r>
@@ -1362,7 +1114,7 @@
             <a:endParaRPr lang="en-US" sz="1600" dirty="0"/>
           </a:p>
           <a:p>
-            <a:pPr indent="0" marL="0">
+            <a:pPr marL="0" indent="0">
               <a:buNone/>
             </a:pPr>
             <a:r>
@@ -1379,7 +1131,7 @@
             <a:endParaRPr lang="en-US" sz="1600" dirty="0"/>
           </a:p>
           <a:p>
-            <a:pPr indent="0" marL="0">
+            <a:pPr marL="0" indent="0">
               <a:buNone/>
             </a:pPr>
             <a:r>
@@ -1396,7 +1148,7 @@
             <a:endParaRPr lang="en-US" sz="1600" dirty="0"/>
           </a:p>
           <a:p>
-            <a:pPr indent="0" marL="0">
+            <a:pPr marL="0" indent="0">
               <a:buNone/>
             </a:pPr>
             <a:r>
@@ -1413,7 +1165,7 @@
             <a:endParaRPr lang="en-US" sz="1600" dirty="0"/>
           </a:p>
           <a:p>
-            <a:pPr indent="0" marL="0">
+            <a:pPr marL="0" indent="0">
               <a:buNone/>
             </a:pPr>
             <a:r>
@@ -1452,7 +1204,7 @@
           <a:bodyPr wrap="square" lIns="0" tIns="0" rIns="0" bIns="0" rtlCol="0" anchor="ctr"/>
           <a:lstStyle/>
           <a:p>
-            <a:pPr indent="0" marL="0">
+            <a:pPr marL="0" indent="0">
               <a:buNone/>
             </a:pPr>
             <a:r>
@@ -1486,6 +1238,7 @@
         <a:solidFill>
           <a:srgbClr val="FFFFFF"/>
         </a:solidFill>
+        <a:effectLst/>
       </p:bgPr>
     </p:bg>
     <p:spTree>
@@ -1523,7 +1276,7 @@
           <a:bodyPr wrap="square" lIns="0" tIns="0" rIns="0" bIns="0" rtlCol="0" anchor="ctr"/>
           <a:lstStyle/>
           <a:p>
-            <a:pPr indent="0" marL="0">
+            <a:pPr marL="0" indent="0">
               <a:buNone/>
             </a:pPr>
             <a:r>
@@ -1562,7 +1315,7 @@
           <a:bodyPr wrap="square" lIns="0" tIns="0" rIns="0" bIns="0" rtlCol="0" anchor="ctr"/>
           <a:lstStyle/>
           <a:p>
-            <a:pPr indent="0" marL="0">
+            <a:pPr marL="0" indent="0">
               <a:buNone/>
             </a:pPr>
             <a:r>
@@ -1601,7 +1354,7 @@
           <a:bodyPr wrap="square" lIns="0" tIns="0" rIns="0" bIns="0" rtlCol="0" anchor="ctr"/>
           <a:lstStyle/>
           <a:p>
-            <a:pPr algn="r" indent="0" marL="0">
+            <a:pPr marL="0" indent="0" algn="r">
               <a:buNone/>
             </a:pPr>
             <a:r>
@@ -1640,7 +1393,7 @@
           <a:bodyPr wrap="square" lIns="0" tIns="0" rIns="0" bIns="0" rtlCol="0" anchor="ctr"/>
           <a:lstStyle/>
           <a:p>
-            <a:pPr indent="0" marL="0">
+            <a:pPr marL="0" indent="0">
               <a:buNone/>
             </a:pPr>
             <a:r>
@@ -1682,6 +1435,13 @@
             <a:prstDash val="solid"/>
           </a:ln>
         </p:spPr>
+        <p:txBody>
+          <a:bodyPr/>
+          <a:lstStyle/>
+          <a:p>
+            <a:endParaRPr lang="en-GB"/>
+          </a:p>
+        </p:txBody>
       </p:sp>
       <p:sp>
         <p:nvSpPr>
@@ -1707,6 +1467,13 @@
             <a:prstDash val="solid"/>
           </a:ln>
         </p:spPr>
+        <p:txBody>
+          <a:bodyPr/>
+          <a:lstStyle/>
+          <a:p>
+            <a:endParaRPr lang="en-GB"/>
+          </a:p>
+        </p:txBody>
       </p:sp>
       <p:sp>
         <p:nvSpPr>
@@ -1732,6 +1499,13 @@
             <a:prstDash val="solid"/>
           </a:ln>
         </p:spPr>
+        <p:txBody>
+          <a:bodyPr/>
+          <a:lstStyle/>
+          <a:p>
+            <a:endParaRPr lang="en-GB"/>
+          </a:p>
+        </p:txBody>
       </p:sp>
       <p:sp>
         <p:nvSpPr>
@@ -1757,6 +1531,13 @@
             <a:prstDash val="solid"/>
           </a:ln>
         </p:spPr>
+        <p:txBody>
+          <a:bodyPr/>
+          <a:lstStyle/>
+          <a:p>
+            <a:endParaRPr lang="en-GB"/>
+          </a:p>
+        </p:txBody>
       </p:sp>
       <p:sp>
         <p:nvSpPr>
@@ -1782,6 +1563,13 @@
             <a:prstDash val="solid"/>
           </a:ln>
         </p:spPr>
+        <p:txBody>
+          <a:bodyPr/>
+          <a:lstStyle/>
+          <a:p>
+            <a:endParaRPr lang="en-GB"/>
+          </a:p>
+        </p:txBody>
       </p:sp>
       <p:sp>
         <p:nvSpPr>
@@ -1807,6 +1595,13 @@
             <a:prstDash val="solid"/>
           </a:ln>
         </p:spPr>
+        <p:txBody>
+          <a:bodyPr/>
+          <a:lstStyle/>
+          <a:p>
+            <a:endParaRPr lang="en-GB"/>
+          </a:p>
+        </p:txBody>
       </p:sp>
       <p:sp>
         <p:nvSpPr>
@@ -1832,6 +1627,13 @@
             <a:prstDash val="solid"/>
           </a:ln>
         </p:spPr>
+        <p:txBody>
+          <a:bodyPr/>
+          <a:lstStyle/>
+          <a:p>
+            <a:endParaRPr lang="en-GB"/>
+          </a:p>
+        </p:txBody>
       </p:sp>
       <p:sp>
         <p:nvSpPr>
@@ -1857,6 +1659,13 @@
             <a:prstDash val="solid"/>
           </a:ln>
         </p:spPr>
+        <p:txBody>
+          <a:bodyPr/>
+          <a:lstStyle/>
+          <a:p>
+            <a:endParaRPr lang="en-GB"/>
+          </a:p>
+        </p:txBody>
       </p:sp>
       <p:sp>
         <p:nvSpPr>
@@ -1882,6 +1691,13 @@
             <a:prstDash val="solid"/>
           </a:ln>
         </p:spPr>
+        <p:txBody>
+          <a:bodyPr/>
+          <a:lstStyle/>
+          <a:p>
+            <a:endParaRPr lang="en-GB"/>
+          </a:p>
+        </p:txBody>
       </p:sp>
       <p:sp>
         <p:nvSpPr>
@@ -1907,6 +1723,13 @@
             <a:prstDash val="solid"/>
           </a:ln>
         </p:spPr>
+        <p:txBody>
+          <a:bodyPr/>
+          <a:lstStyle/>
+          <a:p>
+            <a:endParaRPr lang="en-GB"/>
+          </a:p>
+        </p:txBody>
       </p:sp>
       <p:sp>
         <p:nvSpPr>
@@ -1932,6 +1755,13 @@
             <a:prstDash val="solid"/>
           </a:ln>
         </p:spPr>
+        <p:txBody>
+          <a:bodyPr/>
+          <a:lstStyle/>
+          <a:p>
+            <a:endParaRPr lang="en-GB"/>
+          </a:p>
+        </p:txBody>
       </p:sp>
       <p:sp>
         <p:nvSpPr>
@@ -1957,6 +1787,13 @@
             <a:prstDash val="solid"/>
           </a:ln>
         </p:spPr>
+        <p:txBody>
+          <a:bodyPr/>
+          <a:lstStyle/>
+          <a:p>
+            <a:endParaRPr lang="en-GB"/>
+          </a:p>
+        </p:txBody>
       </p:sp>
       <p:sp>
         <p:nvSpPr>
@@ -1982,6 +1819,13 @@
             <a:prstDash val="solid"/>
           </a:ln>
         </p:spPr>
+        <p:txBody>
+          <a:bodyPr/>
+          <a:lstStyle/>
+          <a:p>
+            <a:endParaRPr lang="en-GB"/>
+          </a:p>
+        </p:txBody>
       </p:sp>
       <p:sp>
         <p:nvSpPr>
@@ -2007,6 +1851,13 @@
             <a:prstDash val="solid"/>
           </a:ln>
         </p:spPr>
+        <p:txBody>
+          <a:bodyPr/>
+          <a:lstStyle/>
+          <a:p>
+            <a:endParaRPr lang="en-GB"/>
+          </a:p>
+        </p:txBody>
       </p:sp>
       <p:sp>
         <p:nvSpPr>
@@ -2032,6 +1883,13 @@
             <a:prstDash val="solid"/>
           </a:ln>
         </p:spPr>
+        <p:txBody>
+          <a:bodyPr/>
+          <a:lstStyle/>
+          <a:p>
+            <a:endParaRPr lang="en-GB"/>
+          </a:p>
+        </p:txBody>
       </p:sp>
       <p:sp>
         <p:nvSpPr>
@@ -2057,6 +1915,13 @@
             <a:prstDash val="solid"/>
           </a:ln>
         </p:spPr>
+        <p:txBody>
+          <a:bodyPr/>
+          <a:lstStyle/>
+          <a:p>
+            <a:endParaRPr lang="en-GB"/>
+          </a:p>
+        </p:txBody>
       </p:sp>
       <p:sp>
         <p:nvSpPr>
@@ -2079,7 +1944,7 @@
           <a:bodyPr wrap="square" lIns="0" tIns="0" rIns="0" bIns="0" rtlCol="0" anchor="ctr"/>
           <a:lstStyle/>
           <a:p>
-            <a:pPr indent="0" marL="0">
+            <a:pPr marL="0" indent="0">
               <a:buNone/>
             </a:pPr>
             <a:r>
@@ -2118,7 +1983,7 @@
           <a:bodyPr wrap="square" lIns="0" tIns="0" rIns="0" bIns="0" rtlCol="0" anchor="ctr"/>
           <a:lstStyle/>
           <a:p>
-            <a:pPr indent="0" marL="0">
+            <a:pPr marL="0" indent="0">
               <a:buNone/>
             </a:pPr>
             <a:r>
@@ -2160,6 +2025,13 @@
             <a:prstDash val="solid"/>
           </a:ln>
         </p:spPr>
+        <p:txBody>
+          <a:bodyPr/>
+          <a:lstStyle/>
+          <a:p>
+            <a:endParaRPr lang="en-GB"/>
+          </a:p>
+        </p:txBody>
       </p:sp>
       <p:sp>
         <p:nvSpPr>
@@ -2185,6 +2057,13 @@
             <a:prstDash val="solid"/>
           </a:ln>
         </p:spPr>
+        <p:txBody>
+          <a:bodyPr/>
+          <a:lstStyle/>
+          <a:p>
+            <a:endParaRPr lang="en-GB"/>
+          </a:p>
+        </p:txBody>
       </p:sp>
       <p:sp>
         <p:nvSpPr>
@@ -2210,6 +2089,13 @@
             <a:prstDash val="solid"/>
           </a:ln>
         </p:spPr>
+        <p:txBody>
+          <a:bodyPr/>
+          <a:lstStyle/>
+          <a:p>
+            <a:endParaRPr lang="en-GB"/>
+          </a:p>
+        </p:txBody>
       </p:sp>
       <p:sp>
         <p:nvSpPr>
@@ -2235,6 +2121,13 @@
             <a:prstDash val="solid"/>
           </a:ln>
         </p:spPr>
+        <p:txBody>
+          <a:bodyPr/>
+          <a:lstStyle/>
+          <a:p>
+            <a:endParaRPr lang="en-GB"/>
+          </a:p>
+        </p:txBody>
       </p:sp>
       <p:sp>
         <p:nvSpPr>
@@ -2260,6 +2153,13 @@
             <a:prstDash val="solid"/>
           </a:ln>
         </p:spPr>
+        <p:txBody>
+          <a:bodyPr/>
+          <a:lstStyle/>
+          <a:p>
+            <a:endParaRPr lang="en-GB"/>
+          </a:p>
+        </p:txBody>
       </p:sp>
       <p:sp>
         <p:nvSpPr>
@@ -2285,6 +2185,13 @@
             <a:prstDash val="solid"/>
           </a:ln>
         </p:spPr>
+        <p:txBody>
+          <a:bodyPr/>
+          <a:lstStyle/>
+          <a:p>
+            <a:endParaRPr lang="en-GB"/>
+          </a:p>
+        </p:txBody>
       </p:sp>
       <p:sp>
         <p:nvSpPr>
@@ -2310,6 +2217,13 @@
             <a:prstDash val="solid"/>
           </a:ln>
         </p:spPr>
+        <p:txBody>
+          <a:bodyPr/>
+          <a:lstStyle/>
+          <a:p>
+            <a:endParaRPr lang="en-GB"/>
+          </a:p>
+        </p:txBody>
       </p:sp>
       <p:sp>
         <p:nvSpPr>
@@ -2335,6 +2249,13 @@
             <a:prstDash val="solid"/>
           </a:ln>
         </p:spPr>
+        <p:txBody>
+          <a:bodyPr/>
+          <a:lstStyle/>
+          <a:p>
+            <a:endParaRPr lang="en-GB"/>
+          </a:p>
+        </p:txBody>
       </p:sp>
       <p:sp>
         <p:nvSpPr>
@@ -2360,6 +2281,13 @@
             <a:prstDash val="solid"/>
           </a:ln>
         </p:spPr>
+        <p:txBody>
+          <a:bodyPr/>
+          <a:lstStyle/>
+          <a:p>
+            <a:endParaRPr lang="en-GB"/>
+          </a:p>
+        </p:txBody>
       </p:sp>
       <p:sp>
         <p:nvSpPr>
@@ -2385,6 +2313,13 @@
             <a:prstDash val="solid"/>
           </a:ln>
         </p:spPr>
+        <p:txBody>
+          <a:bodyPr/>
+          <a:lstStyle/>
+          <a:p>
+            <a:endParaRPr lang="en-GB"/>
+          </a:p>
+        </p:txBody>
       </p:sp>
       <p:sp>
         <p:nvSpPr>
@@ -2410,6 +2345,13 @@
             <a:prstDash val="solid"/>
           </a:ln>
         </p:spPr>
+        <p:txBody>
+          <a:bodyPr/>
+          <a:lstStyle/>
+          <a:p>
+            <a:endParaRPr lang="en-GB"/>
+          </a:p>
+        </p:txBody>
       </p:sp>
       <p:sp>
         <p:nvSpPr>
@@ -2435,6 +2377,13 @@
             <a:prstDash val="solid"/>
           </a:ln>
         </p:spPr>
+        <p:txBody>
+          <a:bodyPr/>
+          <a:lstStyle/>
+          <a:p>
+            <a:endParaRPr lang="en-GB"/>
+          </a:p>
+        </p:txBody>
       </p:sp>
       <p:sp>
         <p:nvSpPr>
@@ -2460,6 +2409,13 @@
             <a:prstDash val="solid"/>
           </a:ln>
         </p:spPr>
+        <p:txBody>
+          <a:bodyPr/>
+          <a:lstStyle/>
+          <a:p>
+            <a:endParaRPr lang="en-GB"/>
+          </a:p>
+        </p:txBody>
       </p:sp>
       <p:sp>
         <p:nvSpPr>
@@ -2485,6 +2441,13 @@
             <a:prstDash val="solid"/>
           </a:ln>
         </p:spPr>
+        <p:txBody>
+          <a:bodyPr/>
+          <a:lstStyle/>
+          <a:p>
+            <a:endParaRPr lang="en-GB"/>
+          </a:p>
+        </p:txBody>
       </p:sp>
       <p:sp>
         <p:nvSpPr>
@@ -2510,6 +2473,13 @@
             <a:prstDash val="solid"/>
           </a:ln>
         </p:spPr>
+        <p:txBody>
+          <a:bodyPr/>
+          <a:lstStyle/>
+          <a:p>
+            <a:endParaRPr lang="en-GB"/>
+          </a:p>
+        </p:txBody>
       </p:sp>
       <p:sp>
         <p:nvSpPr>
@@ -2535,6 +2505,13 @@
             <a:prstDash val="solid"/>
           </a:ln>
         </p:spPr>
+        <p:txBody>
+          <a:bodyPr/>
+          <a:lstStyle/>
+          <a:p>
+            <a:endParaRPr lang="en-GB"/>
+          </a:p>
+        </p:txBody>
       </p:sp>
       <p:sp>
         <p:nvSpPr>
@@ -2557,7 +2534,7 @@
           <a:bodyPr wrap="square" lIns="0" tIns="0" rIns="0" bIns="0" rtlCol="0" anchor="ctr"/>
           <a:lstStyle/>
           <a:p>
-            <a:pPr indent="0" marL="0">
+            <a:pPr marL="0" indent="0">
               <a:buNone/>
             </a:pPr>
             <a:r>
@@ -2601,6 +2578,13 @@
             <a:prstDash val="solid"/>
           </a:ln>
         </p:spPr>
+        <p:txBody>
+          <a:bodyPr/>
+          <a:lstStyle/>
+          <a:p>
+            <a:endParaRPr lang="en-GB"/>
+          </a:p>
+        </p:txBody>
       </p:sp>
       <p:sp>
         <p:nvSpPr>
@@ -2623,7 +2607,7 @@
           <a:bodyPr wrap="square" lIns="50800" tIns="50800" rIns="50800" bIns="50800" rtlCol="0" anchor="ctr"/>
           <a:lstStyle/>
           <a:p>
-            <a:pPr indent="0" marL="0">
+            <a:pPr marL="0" indent="0">
               <a:buNone/>
             </a:pPr>
             <a:r>
@@ -2657,6 +2641,7 @@
         <a:solidFill>
           <a:srgbClr val="FFFFFF"/>
         </a:solidFill>
+        <a:effectLst/>
       </p:bgPr>
     </p:bg>
     <p:spTree>
@@ -2694,7 +2679,7 @@
           <a:bodyPr wrap="square" lIns="0" tIns="0" rIns="0" bIns="0" rtlCol="0" anchor="ctr"/>
           <a:lstStyle/>
           <a:p>
-            <a:pPr indent="0" marL="0">
+            <a:pPr marL="0" indent="0">
               <a:buNone/>
             </a:pPr>
             <a:r>
@@ -2733,7 +2718,7 @@
           <a:bodyPr wrap="square" lIns="0" tIns="0" rIns="0" bIns="0" rtlCol="0" anchor="ctr"/>
           <a:lstStyle/>
           <a:p>
-            <a:pPr indent="0" marL="0">
+            <a:pPr marL="0" indent="0">
               <a:buNone/>
             </a:pPr>
             <a:r>
@@ -2772,7 +2757,7 @@
           <a:bodyPr wrap="square" lIns="0" tIns="0" rIns="0" bIns="0" rtlCol="0" anchor="ctr"/>
           <a:lstStyle/>
           <a:p>
-            <a:pPr algn="r" indent="0" marL="0">
+            <a:pPr marL="0" indent="0" algn="r">
               <a:buNone/>
             </a:pPr>
             <a:r>
@@ -2816,6 +2801,13 @@
             <a:prstDash val="solid"/>
           </a:ln>
         </p:spPr>
+        <p:txBody>
+          <a:bodyPr/>
+          <a:lstStyle/>
+          <a:p>
+            <a:endParaRPr lang="en-GB"/>
+          </a:p>
+        </p:txBody>
       </p:sp>
       <p:sp>
         <p:nvSpPr>
@@ -2838,7 +2830,7 @@
           <a:bodyPr wrap="square" lIns="25400" tIns="25400" rIns="25400" bIns="25400" rtlCol="0" anchor="ctr"/>
           <a:lstStyle/>
           <a:p>
-            <a:pPr algn="ctr" indent="0" marL="0">
+            <a:pPr marL="0" indent="0" algn="ctr">
               <a:buNone/>
             </a:pPr>
             <a:r>
@@ -2877,7 +2869,7 @@
           <a:bodyPr wrap="square" lIns="0" tIns="0" rIns="0" bIns="0" rtlCol="0" anchor="ctr"/>
           <a:lstStyle/>
           <a:p>
-            <a:pPr indent="0" marL="0">
+            <a:pPr marL="0" indent="0">
               <a:buNone/>
             </a:pPr>
             <a:r>
@@ -2916,7 +2908,7 @@
           <a:bodyPr wrap="square" lIns="0" tIns="0" rIns="0" bIns="0" rtlCol="0" anchor="t"/>
           <a:lstStyle/>
           <a:p>
-            <a:pPr indent="0" marL="0">
+            <a:pPr marL="0" indent="0">
               <a:buNone/>
             </a:pPr>
             <a:r>
@@ -2960,6 +2952,13 @@
             <a:prstDash val="solid"/>
           </a:ln>
         </p:spPr>
+        <p:txBody>
+          <a:bodyPr/>
+          <a:lstStyle/>
+          <a:p>
+            <a:endParaRPr lang="en-GB"/>
+          </a:p>
+        </p:txBody>
       </p:sp>
       <p:sp>
         <p:nvSpPr>
@@ -2982,7 +2981,7 @@
           <a:bodyPr wrap="square" lIns="25400" tIns="25400" rIns="25400" bIns="25400" rtlCol="0" anchor="ctr"/>
           <a:lstStyle/>
           <a:p>
-            <a:pPr algn="ctr" indent="0" marL="0">
+            <a:pPr marL="0" indent="0" algn="ctr">
               <a:buNone/>
             </a:pPr>
             <a:r>
@@ -3021,7 +3020,7 @@
           <a:bodyPr wrap="square" lIns="0" tIns="0" rIns="0" bIns="0" rtlCol="0" anchor="ctr"/>
           <a:lstStyle/>
           <a:p>
-            <a:pPr indent="0" marL="0">
+            <a:pPr marL="0" indent="0">
               <a:buNone/>
             </a:pPr>
             <a:r>
@@ -3060,7 +3059,7 @@
           <a:bodyPr wrap="square" lIns="0" tIns="0" rIns="0" bIns="0" rtlCol="0" anchor="t"/>
           <a:lstStyle/>
           <a:p>
-            <a:pPr indent="0" marL="0">
+            <a:pPr marL="0" indent="0">
               <a:buNone/>
             </a:pPr>
             <a:r>
@@ -3104,6 +3103,13 @@
             <a:prstDash val="solid"/>
           </a:ln>
         </p:spPr>
+        <p:txBody>
+          <a:bodyPr/>
+          <a:lstStyle/>
+          <a:p>
+            <a:endParaRPr lang="en-GB"/>
+          </a:p>
+        </p:txBody>
       </p:sp>
       <p:sp>
         <p:nvSpPr>
@@ -3126,7 +3132,7 @@
           <a:bodyPr wrap="square" lIns="25400" tIns="25400" rIns="25400" bIns="25400" rtlCol="0" anchor="ctr"/>
           <a:lstStyle/>
           <a:p>
-            <a:pPr algn="ctr" indent="0" marL="0">
+            <a:pPr marL="0" indent="0" algn="ctr">
               <a:buNone/>
             </a:pPr>
             <a:r>
@@ -3165,7 +3171,7 @@
           <a:bodyPr wrap="square" lIns="0" tIns="0" rIns="0" bIns="0" rtlCol="0" anchor="ctr"/>
           <a:lstStyle/>
           <a:p>
-            <a:pPr indent="0" marL="0">
+            <a:pPr marL="0" indent="0">
               <a:buNone/>
             </a:pPr>
             <a:r>
@@ -3204,7 +3210,7 @@
           <a:bodyPr wrap="square" lIns="0" tIns="0" rIns="0" bIns="0" rtlCol="0" anchor="t"/>
           <a:lstStyle/>
           <a:p>
-            <a:pPr indent="0" marL="0">
+            <a:pPr marL="0" indent="0">
               <a:buNone/>
             </a:pPr>
             <a:r>
@@ -3238,6 +3244,7 @@
         <a:solidFill>
           <a:srgbClr val="FFFFFF"/>
         </a:solidFill>
+        <a:effectLst/>
       </p:bgPr>
     </p:bg>
     <p:spTree>
@@ -3275,7 +3282,7 @@
           <a:bodyPr wrap="square" lIns="0" tIns="0" rIns="0" bIns="0" rtlCol="0" anchor="ctr"/>
           <a:lstStyle/>
           <a:p>
-            <a:pPr indent="0" marL="0">
+            <a:pPr marL="0" indent="0">
               <a:buNone/>
             </a:pPr>
             <a:r>
@@ -3314,7 +3321,7 @@
           <a:bodyPr wrap="square" lIns="0" tIns="0" rIns="0" bIns="0" rtlCol="0" anchor="ctr"/>
           <a:lstStyle/>
           <a:p>
-            <a:pPr indent="0" marL="0">
+            <a:pPr marL="0" indent="0">
               <a:buNone/>
             </a:pPr>
             <a:r>
@@ -3353,7 +3360,7 @@
           <a:bodyPr wrap="square" lIns="0" tIns="0" rIns="0" bIns="0" rtlCol="0" anchor="ctr"/>
           <a:lstStyle/>
           <a:p>
-            <a:pPr algn="r" indent="0" marL="0">
+            <a:pPr marL="0" indent="0" algn="r">
               <a:buNone/>
             </a:pPr>
             <a:r>
@@ -3397,6 +3404,13 @@
             <a:prstDash val="solid"/>
           </a:ln>
         </p:spPr>
+        <p:txBody>
+          <a:bodyPr/>
+          <a:lstStyle/>
+          <a:p>
+            <a:endParaRPr lang="en-GB"/>
+          </a:p>
+        </p:txBody>
       </p:sp>
       <p:sp>
         <p:nvSpPr>
@@ -3419,7 +3433,7 @@
           <a:bodyPr wrap="square" lIns="0" tIns="0" rIns="0" bIns="0" rtlCol="0" anchor="ctr"/>
           <a:lstStyle/>
           <a:p>
-            <a:pPr indent="0" marL="0">
+            <a:pPr marL="0" indent="0">
               <a:buNone/>
             </a:pPr>
             <a:r>
@@ -3458,7 +3472,7 @@
           <a:bodyPr wrap="square" lIns="0" tIns="0" rIns="0" bIns="0" rtlCol="0" anchor="ctr"/>
           <a:lstStyle/>
           <a:p>
-            <a:pPr indent="0" marL="0">
+            <a:pPr marL="0" indent="0">
               <a:buNone/>
             </a:pPr>
             <a:r>
@@ -3502,6 +3516,13 @@
             <a:prstDash val="solid"/>
           </a:ln>
         </p:spPr>
+        <p:txBody>
+          <a:bodyPr/>
+          <a:lstStyle/>
+          <a:p>
+            <a:endParaRPr lang="en-GB"/>
+          </a:p>
+        </p:txBody>
       </p:sp>
       <p:sp>
         <p:nvSpPr>
@@ -3524,7 +3545,7 @@
           <a:bodyPr wrap="square" lIns="0" tIns="0" rIns="0" bIns="0" rtlCol="0" anchor="ctr"/>
           <a:lstStyle/>
           <a:p>
-            <a:pPr indent="0" marL="0">
+            <a:pPr marL="0" indent="0">
               <a:buNone/>
             </a:pPr>
             <a:r>
@@ -3563,7 +3584,7 @@
           <a:bodyPr wrap="square" lIns="0" tIns="0" rIns="0" bIns="0" rtlCol="0" anchor="ctr"/>
           <a:lstStyle/>
           <a:p>
-            <a:pPr indent="0" marL="0">
+            <a:pPr marL="0" indent="0">
               <a:buNone/>
             </a:pPr>
             <a:r>
@@ -3607,6 +3628,13 @@
             <a:prstDash val="solid"/>
           </a:ln>
         </p:spPr>
+        <p:txBody>
+          <a:bodyPr/>
+          <a:lstStyle/>
+          <a:p>
+            <a:endParaRPr lang="en-GB"/>
+          </a:p>
+        </p:txBody>
       </p:sp>
       <p:sp>
         <p:nvSpPr>
@@ -3629,7 +3657,7 @@
           <a:bodyPr wrap="square" lIns="0" tIns="0" rIns="0" bIns="0" rtlCol="0" anchor="ctr"/>
           <a:lstStyle/>
           <a:p>
-            <a:pPr indent="0" marL="0">
+            <a:pPr marL="0" indent="0">
               <a:buNone/>
             </a:pPr>
             <a:r>
@@ -3668,7 +3696,7 @@
           <a:bodyPr wrap="square" lIns="0" tIns="0" rIns="0" bIns="0" rtlCol="0" anchor="ctr"/>
           <a:lstStyle/>
           <a:p>
-            <a:pPr indent="0" marL="0">
+            <a:pPr marL="0" indent="0">
               <a:buNone/>
             </a:pPr>
             <a:r>
@@ -3712,6 +3740,13 @@
             <a:prstDash val="solid"/>
           </a:ln>
         </p:spPr>
+        <p:txBody>
+          <a:bodyPr/>
+          <a:lstStyle/>
+          <a:p>
+            <a:endParaRPr lang="en-GB"/>
+          </a:p>
+        </p:txBody>
       </p:sp>
       <p:sp>
         <p:nvSpPr>
@@ -3734,7 +3769,7 @@
           <a:bodyPr wrap="square" lIns="0" tIns="0" rIns="0" bIns="0" rtlCol="0" anchor="ctr"/>
           <a:lstStyle/>
           <a:p>
-            <a:pPr indent="0" marL="0">
+            <a:pPr marL="0" indent="0">
               <a:buNone/>
             </a:pPr>
             <a:r>
@@ -3773,7 +3808,7 @@
           <a:bodyPr wrap="square" lIns="0" tIns="0" rIns="0" bIns="0" rtlCol="0" anchor="ctr"/>
           <a:lstStyle/>
           <a:p>
-            <a:pPr indent="0" marL="0">
+            <a:pPr marL="0" indent="0">
               <a:buNone/>
             </a:pPr>
             <a:r>
@@ -3817,6 +3852,13 @@
             <a:prstDash val="solid"/>
           </a:ln>
         </p:spPr>
+        <p:txBody>
+          <a:bodyPr/>
+          <a:lstStyle/>
+          <a:p>
+            <a:endParaRPr lang="en-GB"/>
+          </a:p>
+        </p:txBody>
       </p:sp>
       <p:sp>
         <p:nvSpPr>
@@ -3839,7 +3881,7 @@
           <a:bodyPr wrap="square" lIns="50800" tIns="50800" rIns="50800" bIns="50800" rtlCol="0" anchor="ctr"/>
           <a:lstStyle/>
           <a:p>
-            <a:pPr indent="0" marL="0">
+            <a:pPr marL="0" indent="0">
               <a:buNone/>
             </a:pPr>
             <a:r>
@@ -3873,6 +3915,7 @@
         <a:solidFill>
           <a:srgbClr val="FFFFFF"/>
         </a:solidFill>
+        <a:effectLst/>
       </p:bgPr>
     </p:bg>
     <p:spTree>
@@ -3910,7 +3953,7 @@
           <a:bodyPr wrap="square" lIns="0" tIns="0" rIns="0" bIns="0" rtlCol="0" anchor="ctr"/>
           <a:lstStyle/>
           <a:p>
-            <a:pPr indent="0" marL="0">
+            <a:pPr marL="0" indent="0">
               <a:buNone/>
             </a:pPr>
             <a:r>
@@ -3949,7 +3992,7 @@
           <a:bodyPr wrap="square" lIns="0" tIns="0" rIns="0" bIns="0" rtlCol="0" anchor="ctr"/>
           <a:lstStyle/>
           <a:p>
-            <a:pPr indent="0" marL="0">
+            <a:pPr marL="0" indent="0">
               <a:buNone/>
             </a:pPr>
             <a:r>
@@ -3988,7 +4031,7 @@
           <a:bodyPr wrap="square" lIns="0" tIns="0" rIns="0" bIns="0" rtlCol="0" anchor="ctr"/>
           <a:lstStyle/>
           <a:p>
-            <a:pPr algn="r" indent="0" marL="0">
+            <a:pPr marL="0" indent="0" algn="r">
               <a:buNone/>
             </a:pPr>
             <a:r>
@@ -4032,6 +4075,13 @@
             <a:prstDash val="solid"/>
           </a:ln>
         </p:spPr>
+        <p:txBody>
+          <a:bodyPr/>
+          <a:lstStyle/>
+          <a:p>
+            <a:endParaRPr lang="en-GB"/>
+          </a:p>
+        </p:txBody>
       </p:sp>
       <p:sp>
         <p:nvSpPr>
@@ -4054,7 +4104,7 @@
           <a:bodyPr wrap="square" lIns="25400" tIns="25400" rIns="25400" bIns="25400" rtlCol="0" anchor="ctr"/>
           <a:lstStyle/>
           <a:p>
-            <a:pPr algn="ctr" indent="0" marL="0">
+            <a:pPr marL="0" indent="0" algn="ctr">
               <a:buNone/>
             </a:pPr>
             <a:r>
@@ -4096,6 +4146,13 @@
             <a:prstDash val="solid"/>
           </a:ln>
         </p:spPr>
+        <p:txBody>
+          <a:bodyPr/>
+          <a:lstStyle/>
+          <a:p>
+            <a:endParaRPr lang="en-GB"/>
+          </a:p>
+        </p:txBody>
       </p:sp>
       <p:sp>
         <p:nvSpPr>
@@ -4123,6 +4180,13 @@
             <a:prstDash val="solid"/>
           </a:ln>
         </p:spPr>
+        <p:txBody>
+          <a:bodyPr/>
+          <a:lstStyle/>
+          <a:p>
+            <a:endParaRPr lang="en-GB"/>
+          </a:p>
+        </p:txBody>
       </p:sp>
       <p:sp>
         <p:nvSpPr>
@@ -4145,7 +4209,7 @@
           <a:bodyPr wrap="square" lIns="25400" tIns="25400" rIns="25400" bIns="25400" rtlCol="0" anchor="ctr"/>
           <a:lstStyle/>
           <a:p>
-            <a:pPr algn="ctr" indent="0" marL="0">
+            <a:pPr marL="0" indent="0" algn="ctr">
               <a:buNone/>
             </a:pPr>
             <a:r>
@@ -4187,6 +4251,13 @@
             <a:prstDash val="solid"/>
           </a:ln>
         </p:spPr>
+        <p:txBody>
+          <a:bodyPr/>
+          <a:lstStyle/>
+          <a:p>
+            <a:endParaRPr lang="en-GB"/>
+          </a:p>
+        </p:txBody>
       </p:sp>
       <p:sp>
         <p:nvSpPr>
@@ -4209,7 +4280,7 @@
           <a:bodyPr wrap="square" lIns="0" tIns="0" rIns="0" bIns="0" rtlCol="0" anchor="ctr"/>
           <a:lstStyle/>
           <a:p>
-            <a:pPr algn="ctr" indent="0" marL="0">
+            <a:pPr marL="0" indent="0" algn="ctr">
               <a:buNone/>
             </a:pPr>
             <a:r>
@@ -4253,6 +4324,13 @@
             <a:prstDash val="solid"/>
           </a:ln>
         </p:spPr>
+        <p:txBody>
+          <a:bodyPr/>
+          <a:lstStyle/>
+          <a:p>
+            <a:endParaRPr lang="en-GB"/>
+          </a:p>
+        </p:txBody>
       </p:sp>
       <p:sp>
         <p:nvSpPr>
@@ -4275,7 +4353,7 @@
           <a:bodyPr wrap="square" lIns="25400" tIns="25400" rIns="25400" bIns="25400" rtlCol="0" anchor="ctr"/>
           <a:lstStyle/>
           <a:p>
-            <a:pPr algn="ctr" indent="0" marL="0">
+            <a:pPr marL="0" indent="0" algn="ctr">
               <a:buNone/>
             </a:pPr>
             <a:r>
@@ -4292,7 +4370,7 @@
             <a:endParaRPr lang="en-US" sz="1300" dirty="0"/>
           </a:p>
           <a:p>
-            <a:pPr algn="ctr" indent="0" marL="0">
+            <a:pPr marL="0" indent="0" algn="ctr">
               <a:buNone/>
             </a:pPr>
             <a:r>
@@ -4334,6 +4412,13 @@
             <a:prstDash val="solid"/>
           </a:ln>
         </p:spPr>
+        <p:txBody>
+          <a:bodyPr/>
+          <a:lstStyle/>
+          <a:p>
+            <a:endParaRPr lang="en-GB"/>
+          </a:p>
+        </p:txBody>
       </p:sp>
       <p:sp>
         <p:nvSpPr>
@@ -4356,7 +4441,7 @@
           <a:bodyPr wrap="square" lIns="0" tIns="0" rIns="0" bIns="0" rtlCol="0" anchor="ctr"/>
           <a:lstStyle/>
           <a:p>
-            <a:pPr algn="ctr" indent="0" marL="0">
+            <a:pPr marL="0" indent="0" algn="ctr">
               <a:buNone/>
             </a:pPr>
             <a:r>
@@ -4400,6 +4485,13 @@
             <a:prstDash val="solid"/>
           </a:ln>
         </p:spPr>
+        <p:txBody>
+          <a:bodyPr/>
+          <a:lstStyle/>
+          <a:p>
+            <a:endParaRPr lang="en-GB"/>
+          </a:p>
+        </p:txBody>
       </p:sp>
       <p:sp>
         <p:nvSpPr>
@@ -4422,7 +4514,7 @@
           <a:bodyPr wrap="square" lIns="25400" tIns="25400" rIns="25400" bIns="25400" rtlCol="0" anchor="ctr"/>
           <a:lstStyle/>
           <a:p>
-            <a:pPr algn="ctr" indent="0" marL="0">
+            <a:pPr marL="0" indent="0" algn="ctr">
               <a:buNone/>
             </a:pPr>
             <a:r>
@@ -4439,7 +4531,7 @@
             <a:endParaRPr lang="en-US" sz="1300" dirty="0"/>
           </a:p>
           <a:p>
-            <a:pPr algn="ctr" indent="0" marL="0">
+            <a:pPr marL="0" indent="0" algn="ctr">
               <a:buNone/>
             </a:pPr>
             <a:r>
@@ -4478,7 +4570,7 @@
           <a:bodyPr wrap="square" lIns="0" tIns="0" rIns="0" bIns="0" rtlCol="0" anchor="ctr"/>
           <a:lstStyle/>
           <a:p>
-            <a:pPr algn="ctr" indent="0" marL="0">
+            <a:pPr marL="0" indent="0" algn="ctr">
               <a:buNone/>
             </a:pPr>
             <a:r>
@@ -4607,6 +4699,13 @@
             <a:prstDash val="solid"/>
           </a:ln>
         </p:spPr>
+        <p:txBody>
+          <a:bodyPr/>
+          <a:lstStyle/>
+          <a:p>
+            <a:endParaRPr lang="en-GB"/>
+          </a:p>
+        </p:txBody>
       </p:sp>
       <p:sp>
         <p:nvSpPr>
@@ -4629,7 +4728,7 @@
           <a:bodyPr wrap="square" lIns="50800" tIns="50800" rIns="50800" bIns="50800" rtlCol="0" anchor="ctr"/>
           <a:lstStyle/>
           <a:p>
-            <a:pPr indent="0" marL="0">
+            <a:pPr marL="0" indent="0">
               <a:buNone/>
             </a:pPr>
             <a:r>
@@ -4948,4 +5047,319 @@
     </a:ext>
   </a:extLst>
 </a:theme>
+</file>
+
+<file path=ppt/theme/theme2.xml><?xml version="1.0" encoding="utf-8"?>
+<a:theme xmlns:a="http://schemas.openxmlformats.org/drawingml/2006/main" name="Thème Office">
+  <a:themeElements>
+    <a:clrScheme name="Office">
+      <a:dk1>
+        <a:sysClr val="windowText" lastClr="000000"/>
+      </a:dk1>
+      <a:lt1>
+        <a:sysClr val="window" lastClr="FFFFFF"/>
+      </a:lt1>
+      <a:dk2>
+        <a:srgbClr val="0E2841"/>
+      </a:dk2>
+      <a:lt2>
+        <a:srgbClr val="E8E8E8"/>
+      </a:lt2>
+      <a:accent1>
+        <a:srgbClr val="156082"/>
+      </a:accent1>
+      <a:accent2>
+        <a:srgbClr val="E97132"/>
+      </a:accent2>
+      <a:accent3>
+        <a:srgbClr val="196B24"/>
+      </a:accent3>
+      <a:accent4>
+        <a:srgbClr val="0F9ED5"/>
+      </a:accent4>
+      <a:accent5>
+        <a:srgbClr val="A02B93"/>
+      </a:accent5>
+      <a:accent6>
+        <a:srgbClr val="4EA72E"/>
+      </a:accent6>
+      <a:hlink>
+        <a:srgbClr val="467886"/>
+      </a:hlink>
+      <a:folHlink>
+        <a:srgbClr val="96607D"/>
+      </a:folHlink>
+    </a:clrScheme>
+    <a:fontScheme name="Office">
+      <a:majorFont>
+        <a:latin typeface="Aptos Display" panose="02110004020202020204"/>
+        <a:ea typeface=""/>
+        <a:cs typeface=""/>
+        <a:font script="Jpan" typeface="游ゴシック Light"/>
+        <a:font script="Hang" typeface="맑은 고딕"/>
+        <a:font script="Hans" typeface="等线 Light"/>
+        <a:font script="Hant" typeface="新細明體"/>
+        <a:font script="Arab" typeface="Times New Roman"/>
+        <a:font script="Hebr" typeface="Times New Roman"/>
+        <a:font script="Thai" typeface="Angsana New"/>
+        <a:font script="Ethi" typeface="Nyala"/>
+        <a:font script="Beng" typeface="Vrinda"/>
+        <a:font script="Gujr" typeface="Shruti"/>
+        <a:font script="Khmr" typeface="MoolBoran"/>
+        <a:font script="Knda" typeface="Tunga"/>
+        <a:font script="Guru" typeface="Raavi"/>
+        <a:font script="Cans" typeface="Euphemia"/>
+        <a:font script="Cher" typeface="Plantagenet Cherokee"/>
+        <a:font script="Yiii" typeface="Microsoft Yi Baiti"/>
+        <a:font script="Tibt" typeface="Microsoft Himalaya"/>
+        <a:font script="Thaa" typeface="MV Boli"/>
+        <a:font script="Deva" typeface="Mangal"/>
+        <a:font script="Telu" typeface="Gautami"/>
+        <a:font script="Taml" typeface="Latha"/>
+        <a:font script="Syrc" typeface="Estrangelo Edessa"/>
+        <a:font script="Orya" typeface="Kalinga"/>
+        <a:font script="Mlym" typeface="Kartika"/>
+        <a:font script="Laoo" typeface="DokChampa"/>
+        <a:font script="Sinh" typeface="Iskoola Pota"/>
+        <a:font script="Mong" typeface="Mongolian Baiti"/>
+        <a:font script="Viet" typeface="Times New Roman"/>
+        <a:font script="Uigh" typeface="Microsoft Uighur"/>
+        <a:font script="Geor" typeface="Sylfaen"/>
+        <a:font script="Armn" typeface="Arial"/>
+        <a:font script="Bugi" typeface="Leelawadee UI"/>
+        <a:font script="Bopo" typeface="Microsoft JhengHei"/>
+        <a:font script="Java" typeface="Javanese Text"/>
+        <a:font script="Lisu" typeface="Segoe UI"/>
+        <a:font script="Mymr" typeface="Myanmar Text"/>
+        <a:font script="Nkoo" typeface="Ebrima"/>
+        <a:font script="Olck" typeface="Nirmala UI"/>
+        <a:font script="Osma" typeface="Ebrima"/>
+        <a:font script="Phag" typeface="Phagspa"/>
+        <a:font script="Syrn" typeface="Estrangelo Edessa"/>
+        <a:font script="Syrj" typeface="Estrangelo Edessa"/>
+        <a:font script="Syre" typeface="Estrangelo Edessa"/>
+        <a:font script="Sora" typeface="Nirmala UI"/>
+        <a:font script="Tale" typeface="Microsoft Tai Le"/>
+        <a:font script="Talu" typeface="Microsoft New Tai Lue"/>
+        <a:font script="Tfng" typeface="Ebrima"/>
+      </a:majorFont>
+      <a:minorFont>
+        <a:latin typeface="Aptos" panose="02110004020202020204"/>
+        <a:ea typeface=""/>
+        <a:cs typeface=""/>
+        <a:font script="Jpan" typeface="游ゴシック"/>
+        <a:font script="Hang" typeface="맑은 고딕"/>
+        <a:font script="Hans" typeface="等线"/>
+        <a:font script="Hant" typeface="新細明體"/>
+        <a:font script="Arab" typeface="Arial"/>
+        <a:font script="Hebr" typeface="Arial"/>
+        <a:font script="Thai" typeface="Cordia New"/>
+        <a:font script="Ethi" typeface="Nyala"/>
+        <a:font script="Beng" typeface="Vrinda"/>
+        <a:font script="Gujr" typeface="Shruti"/>
+        <a:font script="Khmr" typeface="DaunPenh"/>
+        <a:font script="Knda" typeface="Tunga"/>
+        <a:font script="Guru" typeface="Raavi"/>
+        <a:font script="Cans" typeface="Euphemia"/>
+        <a:font script="Cher" typeface="Plantagenet Cherokee"/>
+        <a:font script="Yiii" typeface="Microsoft Yi Baiti"/>
+        <a:font script="Tibt" typeface="Microsoft Himalaya"/>
+        <a:font script="Thaa" typeface="MV Boli"/>
+        <a:font script="Deva" typeface="Mangal"/>
+        <a:font script="Telu" typeface="Gautami"/>
+        <a:font script="Taml" typeface="Latha"/>
+        <a:font script="Syrc" typeface="Estrangelo Edessa"/>
+        <a:font script="Orya" typeface="Kalinga"/>
+        <a:font script="Mlym" typeface="Kartika"/>
+        <a:font script="Laoo" typeface="DokChampa"/>
+        <a:font script="Sinh" typeface="Iskoola Pota"/>
+        <a:font script="Mong" typeface="Mongolian Baiti"/>
+        <a:font script="Viet" typeface="Arial"/>
+        <a:font script="Uigh" typeface="Microsoft Uighur"/>
+        <a:font script="Geor" typeface="Sylfaen"/>
+        <a:font script="Armn" typeface="Arial"/>
+        <a:font script="Bugi" typeface="Leelawadee UI"/>
+        <a:font script="Bopo" typeface="Microsoft JhengHei"/>
+        <a:font script="Java" typeface="Javanese Text"/>
+        <a:font script="Lisu" typeface="Segoe UI"/>
+        <a:font script="Mymr" typeface="Myanmar Text"/>
+        <a:font script="Nkoo" typeface="Ebrima"/>
+        <a:font script="Olck" typeface="Nirmala UI"/>
+        <a:font script="Osma" typeface="Ebrima"/>
+        <a:font script="Phag" typeface="Phagspa"/>
+        <a:font script="Syrn" typeface="Estrangelo Edessa"/>
+        <a:font script="Syrj" typeface="Estrangelo Edessa"/>
+        <a:font script="Syre" typeface="Estrangelo Edessa"/>
+        <a:font script="Sora" typeface="Nirmala UI"/>
+        <a:font script="Tale" typeface="Microsoft Tai Le"/>
+        <a:font script="Talu" typeface="Microsoft New Tai Lue"/>
+        <a:font script="Tfng" typeface="Ebrima"/>
+      </a:minorFont>
+    </a:fontScheme>
+    <a:fmtScheme name="Office">
+      <a:fillStyleLst>
+        <a:solidFill>
+          <a:schemeClr val="phClr"/>
+        </a:solidFill>
+        <a:gradFill rotWithShape="1">
+          <a:gsLst>
+            <a:gs pos="0">
+              <a:schemeClr val="phClr">
+                <a:lumMod val="110000"/>
+                <a:satMod val="105000"/>
+                <a:tint val="67000"/>
+              </a:schemeClr>
+            </a:gs>
+            <a:gs pos="50000">
+              <a:schemeClr val="phClr">
+                <a:lumMod val="105000"/>
+                <a:satMod val="103000"/>
+                <a:tint val="73000"/>
+              </a:schemeClr>
+            </a:gs>
+            <a:gs pos="100000">
+              <a:schemeClr val="phClr">
+                <a:lumMod val="105000"/>
+                <a:satMod val="109000"/>
+                <a:tint val="81000"/>
+              </a:schemeClr>
+            </a:gs>
+          </a:gsLst>
+          <a:lin ang="5400000" scaled="0"/>
+        </a:gradFill>
+        <a:gradFill rotWithShape="1">
+          <a:gsLst>
+            <a:gs pos="0">
+              <a:schemeClr val="phClr">
+                <a:satMod val="103000"/>
+                <a:lumMod val="102000"/>
+                <a:tint val="94000"/>
+              </a:schemeClr>
+            </a:gs>
+            <a:gs pos="50000">
+              <a:schemeClr val="phClr">
+                <a:satMod val="110000"/>
+                <a:lumMod val="100000"/>
+                <a:shade val="100000"/>
+              </a:schemeClr>
+            </a:gs>
+            <a:gs pos="100000">
+              <a:schemeClr val="phClr">
+                <a:lumMod val="99000"/>
+                <a:satMod val="120000"/>
+                <a:shade val="78000"/>
+              </a:schemeClr>
+            </a:gs>
+          </a:gsLst>
+          <a:lin ang="5400000" scaled="0"/>
+        </a:gradFill>
+      </a:fillStyleLst>
+      <a:lnStyleLst>
+        <a:ln w="12700" cap="flat" cmpd="sng" algn="ctr">
+          <a:solidFill>
+            <a:schemeClr val="phClr"/>
+          </a:solidFill>
+          <a:prstDash val="solid"/>
+          <a:miter lim="800000"/>
+        </a:ln>
+        <a:ln w="19050" cap="flat" cmpd="sng" algn="ctr">
+          <a:solidFill>
+            <a:schemeClr val="phClr"/>
+          </a:solidFill>
+          <a:prstDash val="solid"/>
+          <a:miter lim="800000"/>
+        </a:ln>
+        <a:ln w="25400" cap="flat" cmpd="sng" algn="ctr">
+          <a:solidFill>
+            <a:schemeClr val="phClr"/>
+          </a:solidFill>
+          <a:prstDash val="solid"/>
+          <a:miter lim="800000"/>
+        </a:ln>
+      </a:lnStyleLst>
+      <a:effectStyleLst>
+        <a:effectStyle>
+          <a:effectLst/>
+        </a:effectStyle>
+        <a:effectStyle>
+          <a:effectLst/>
+        </a:effectStyle>
+        <a:effectStyle>
+          <a:effectLst>
+            <a:outerShdw blurRad="57150" dist="19050" dir="5400000" algn="ctr" rotWithShape="0">
+              <a:srgbClr val="000000">
+                <a:alpha val="63000"/>
+              </a:srgbClr>
+            </a:outerShdw>
+          </a:effectLst>
+        </a:effectStyle>
+      </a:effectStyleLst>
+      <a:bgFillStyleLst>
+        <a:solidFill>
+          <a:schemeClr val="phClr"/>
+        </a:solidFill>
+        <a:solidFill>
+          <a:schemeClr val="phClr">
+            <a:tint val="95000"/>
+            <a:satMod val="170000"/>
+          </a:schemeClr>
+        </a:solidFill>
+        <a:gradFill rotWithShape="1">
+          <a:gsLst>
+            <a:gs pos="0">
+              <a:schemeClr val="phClr">
+                <a:tint val="93000"/>
+                <a:satMod val="150000"/>
+                <a:shade val="98000"/>
+                <a:lumMod val="102000"/>
+              </a:schemeClr>
+            </a:gs>
+            <a:gs pos="50000">
+              <a:schemeClr val="phClr">
+                <a:tint val="98000"/>
+                <a:satMod val="130000"/>
+                <a:shade val="90000"/>
+                <a:lumMod val="103000"/>
+              </a:schemeClr>
+            </a:gs>
+            <a:gs pos="100000">
+              <a:schemeClr val="phClr">
+                <a:shade val="63000"/>
+                <a:satMod val="120000"/>
+              </a:schemeClr>
+            </a:gs>
+          </a:gsLst>
+          <a:lin ang="5400000" scaled="0"/>
+        </a:gradFill>
+      </a:bgFillStyleLst>
+    </a:fmtScheme>
+  </a:themeElements>
+  <a:objectDefaults>
+    <a:lnDef>
+      <a:spPr/>
+      <a:bodyPr/>
+      <a:lstStyle/>
+      <a:style>
+        <a:lnRef idx="2">
+          <a:schemeClr val="accent1"/>
+        </a:lnRef>
+        <a:fillRef idx="0">
+          <a:schemeClr val="accent1"/>
+        </a:fillRef>
+        <a:effectRef idx="1">
+          <a:schemeClr val="accent1"/>
+        </a:effectRef>
+        <a:fontRef idx="minor">
+          <a:schemeClr val="tx1"/>
+        </a:fontRef>
+      </a:style>
+    </a:lnDef>
+  </a:objectDefaults>
+  <a:extraClrSchemeLst/>
+  <a:extLst>
+    <a:ext uri="{05A4C25C-085E-4340-85A3-A5531E510DB2}">
+      <thm15:themeFamily xmlns:thm15="http://schemas.microsoft.com/office/thememl/2012/main" name="Office Theme" id="{2E142A2C-CD16-42D6-873A-C26D2A0506FA}" vid="{1BDDFF52-6CD6-40A5-AB3C-68EB2F1E4D0A}"/>
+    </a:ext>
+  </a:extLst>
+</a:theme>
 </file>